--- a/Day04-Architecture-and-MongoDB/Day04_Deck_Architecture_and_MongoDB.pptx
+++ b/Day04-Architecture-and-MongoDB/Day04_Deck_Architecture_and_MongoDB.pptx
@@ -6552,13 +6552,13 @@
           <a:noFill/>
         </p:spPr>
         <p:txBody>
-          <a:bodyPr wrap="square" lIns="0" rIns="0" tIns="0" bIns="0" anchor="t">
-            <a:spAutoFit/>
-          </a:bodyPr>
-          <a:lstStyle/>
-          <a:p>
-            <a:r>
-              <a:rPr sz="1108" b="0" i="0">
+          <a:bodyPr wrap="none" lIns="0" rIns="0" tIns="0" bIns="0" anchor="t">
+            <a:spAutoFit/>
+          </a:bodyPr>
+          <a:lstStyle/>
+          <a:p>
+            <a:r>
+              <a:rPr sz="975" b="0" i="0">
                 <a:solidFill>
                   <a:srgbClr val="EAF7F5"/>
                 </a:solidFill>
@@ -6569,7 +6569,7 @@
           </a:p>
           <a:p>
             <a:r>
-              <a:rPr sz="1108" b="0" i="0">
+              <a:rPr sz="975" b="0" i="0">
                 <a:solidFill>
                   <a:srgbClr val="EAF7F5"/>
                 </a:solidFill>
@@ -6580,7 +6580,7 @@
           </a:p>
           <a:p>
             <a:r>
-              <a:rPr sz="1108" b="0" i="0">
+              <a:rPr sz="975" b="0" i="0">
                 <a:solidFill>
                   <a:srgbClr val="EAF7F5"/>
                 </a:solidFill>
@@ -6591,7 +6591,7 @@
           </a:p>
           <a:p>
             <a:r>
-              <a:rPr sz="1108" b="0" i="0">
+              <a:rPr sz="975" b="0" i="0">
                 <a:solidFill>
                   <a:srgbClr val="EAF7F5"/>
                 </a:solidFill>
@@ -6602,7 +6602,7 @@
           </a:p>
           <a:p>
             <a:r>
-              <a:rPr sz="1108" b="0" i="0">
+              <a:rPr sz="975" b="0" i="0">
                 <a:solidFill>
                   <a:srgbClr val="EAF7F5"/>
                 </a:solidFill>
@@ -6613,7 +6613,7 @@
           </a:p>
           <a:p>
             <a:r>
-              <a:rPr sz="1108" b="0" i="0">
+              <a:rPr sz="975" b="0" i="0">
                 <a:solidFill>
                   <a:srgbClr val="EAF7F5"/>
                 </a:solidFill>
@@ -6624,7 +6624,7 @@
           </a:p>
           <a:p>
             <a:r>
-              <a:rPr sz="1108" b="0" i="0">
+              <a:rPr sz="975" b="0" i="0">
                 <a:solidFill>
                   <a:srgbClr val="EAF7F5"/>
                 </a:solidFill>
@@ -6635,7 +6635,7 @@
           </a:p>
           <a:p>
             <a:r>
-              <a:rPr sz="1108" b="0" i="0">
+              <a:rPr sz="975" b="0" i="0">
                 <a:solidFill>
                   <a:srgbClr val="EAF7F5"/>
                 </a:solidFill>
@@ -7978,13 +7978,13 @@
           <a:noFill/>
         </p:spPr>
         <p:txBody>
-          <a:bodyPr wrap="square" lIns="0" rIns="0" tIns="0" bIns="0" anchor="t">
-            <a:spAutoFit/>
-          </a:bodyPr>
-          <a:lstStyle/>
-          <a:p>
-            <a:r>
-              <a:rPr sz="1085" b="0" i="0">
+          <a:bodyPr wrap="none" lIns="0" rIns="0" tIns="0" bIns="0" anchor="t">
+            <a:spAutoFit/>
+          </a:bodyPr>
+          <a:lstStyle/>
+          <a:p>
+            <a:r>
+              <a:rPr sz="954" b="0" i="0">
                 <a:solidFill>
                   <a:srgbClr val="EAF7F5"/>
                 </a:solidFill>
@@ -7995,7 +7995,7 @@
           </a:p>
           <a:p>
             <a:r>
-              <a:rPr sz="1085" b="0" i="0">
+              <a:rPr sz="954" b="0" i="0">
                 <a:solidFill>
                   <a:srgbClr val="EAF7F5"/>
                 </a:solidFill>
@@ -8006,7 +8006,7 @@
           </a:p>
           <a:p>
             <a:r>
-              <a:rPr sz="1085" b="0" i="0">
+              <a:rPr sz="954" b="0" i="0">
                 <a:solidFill>
                   <a:srgbClr val="EAF7F5"/>
                 </a:solidFill>
@@ -8017,7 +8017,7 @@
           </a:p>
           <a:p>
             <a:r>
-              <a:rPr sz="1085" b="0" i="0">
+              <a:rPr sz="954" b="0" i="0">
                 <a:solidFill>
                   <a:srgbClr val="EAF7F5"/>
                 </a:solidFill>
@@ -8028,7 +8028,7 @@
           </a:p>
           <a:p>
             <a:r>
-              <a:rPr sz="1085" b="0" i="0">
+              <a:rPr sz="954" b="0" i="0">
                 <a:solidFill>
                   <a:srgbClr val="EAF7F5"/>
                 </a:solidFill>
@@ -8039,7 +8039,7 @@
           </a:p>
           <a:p>
             <a:r>
-              <a:rPr sz="1085" b="0" i="0">
+              <a:rPr sz="954" b="0" i="0">
                 <a:solidFill>
                   <a:srgbClr val="EAF7F5"/>
                 </a:solidFill>
@@ -8050,7 +8050,7 @@
           </a:p>
           <a:p>
             <a:r>
-              <a:rPr sz="1085" b="0" i="0">
+              <a:rPr sz="954" b="0" i="0">
                 <a:solidFill>
                   <a:srgbClr val="EAF7F5"/>
                 </a:solidFill>
@@ -8061,7 +8061,7 @@
           </a:p>
           <a:p>
             <a:r>
-              <a:rPr sz="1085" b="0" i="0">
+              <a:rPr sz="954" b="0" i="0">
                 <a:solidFill>
                   <a:srgbClr val="EAF7F5"/>
                 </a:solidFill>
@@ -8072,7 +8072,7 @@
           </a:p>
           <a:p>
             <a:r>
-              <a:rPr sz="1085" b="0" i="0">
+              <a:rPr sz="954" b="0" i="0">
                 <a:solidFill>
                   <a:srgbClr val="EAF7F5"/>
                 </a:solidFill>
@@ -8083,7 +8083,7 @@
           </a:p>
           <a:p>
             <a:r>
-              <a:rPr sz="1085" b="0" i="0">
+              <a:rPr sz="954" b="0" i="0">
                 <a:solidFill>
                   <a:srgbClr val="EAF7F5"/>
                 </a:solidFill>
@@ -8094,7 +8094,7 @@
           </a:p>
           <a:p>
             <a:r>
-              <a:rPr sz="1085" b="0" i="0">
+              <a:rPr sz="954" b="0" i="0">
                 <a:solidFill>
                   <a:srgbClr val="EAF7F5"/>
                 </a:solidFill>
@@ -8105,7 +8105,7 @@
           </a:p>
           <a:p>
             <a:r>
-              <a:rPr sz="1085" b="0" i="0">
+              <a:rPr sz="954" b="0" i="0">
                 <a:solidFill>
                   <a:srgbClr val="EAF7F5"/>
                 </a:solidFill>
@@ -8116,7 +8116,7 @@
           </a:p>
           <a:p>
             <a:r>
-              <a:rPr sz="1085" b="0" i="0">
+              <a:rPr sz="954" b="0" i="0">
                 <a:solidFill>
                   <a:srgbClr val="EAF7F5"/>
                 </a:solidFill>
@@ -8404,13 +8404,13 @@
           <a:noFill/>
         </p:spPr>
         <p:txBody>
-          <a:bodyPr wrap="square" lIns="0" rIns="0" tIns="0" bIns="0" anchor="t">
-            <a:spAutoFit/>
-          </a:bodyPr>
-          <a:lstStyle/>
-          <a:p>
-            <a:r>
-              <a:rPr sz="944" b="0" i="0">
+          <a:bodyPr wrap="none" lIns="0" rIns="0" tIns="0" bIns="0" anchor="t">
+            <a:spAutoFit/>
+          </a:bodyPr>
+          <a:lstStyle/>
+          <a:p>
+            <a:r>
+              <a:rPr sz="831" b="0" i="0">
                 <a:solidFill>
                   <a:srgbClr val="EAF7F5"/>
                 </a:solidFill>
@@ -8421,7 +8421,7 @@
           </a:p>
           <a:p>
             <a:r>
-              <a:rPr sz="944" b="0" i="0">
+              <a:rPr sz="831" b="0" i="0">
                 <a:solidFill>
                   <a:srgbClr val="EAF7F5"/>
                 </a:solidFill>
@@ -8432,7 +8432,7 @@
           </a:p>
           <a:p>
             <a:r>
-              <a:rPr sz="944" b="0" i="0">
+              <a:rPr sz="831" b="0" i="0">
                 <a:solidFill>
                   <a:srgbClr val="EAF7F5"/>
                 </a:solidFill>
@@ -8443,7 +8443,7 @@
           </a:p>
           <a:p>
             <a:r>
-              <a:rPr sz="944" b="0" i="0">
+              <a:rPr sz="831" b="0" i="0">
                 <a:solidFill>
                   <a:srgbClr val="EAF7F5"/>
                 </a:solidFill>
@@ -8454,7 +8454,7 @@
           </a:p>
           <a:p>
             <a:r>
-              <a:rPr sz="944" b="0" i="0">
+              <a:rPr sz="831" b="0" i="0">
                 <a:solidFill>
                   <a:srgbClr val="EAF7F5"/>
                 </a:solidFill>
@@ -8465,7 +8465,7 @@
           </a:p>
           <a:p>
             <a:r>
-              <a:rPr sz="944" b="0" i="0">
+              <a:rPr sz="831" b="0" i="0">
                 <a:solidFill>
                   <a:srgbClr val="EAF7F5"/>
                 </a:solidFill>
@@ -8476,7 +8476,7 @@
           </a:p>
           <a:p>
             <a:r>
-              <a:rPr sz="944" b="0" i="0">
+              <a:rPr sz="831" b="0" i="0">
                 <a:solidFill>
                   <a:srgbClr val="EAF7F5"/>
                 </a:solidFill>
@@ -8487,7 +8487,7 @@
           </a:p>
           <a:p>
             <a:r>
-              <a:rPr sz="944" b="0" i="0">
+              <a:rPr sz="831" b="0" i="0">
                 <a:solidFill>
                   <a:srgbClr val="EAF7F5"/>
                 </a:solidFill>
@@ -10120,13 +10120,13 @@
           <a:noFill/>
         </p:spPr>
         <p:txBody>
-          <a:bodyPr wrap="square" lIns="0" rIns="0" tIns="0" bIns="0" anchor="t">
-            <a:spAutoFit/>
-          </a:bodyPr>
-          <a:lstStyle/>
-          <a:p>
-            <a:r>
-              <a:rPr sz="1019" b="0" i="0">
+          <a:bodyPr wrap="none" lIns="0" rIns="0" tIns="0" bIns="0" anchor="t">
+            <a:spAutoFit/>
+          </a:bodyPr>
+          <a:lstStyle/>
+          <a:p>
+            <a:r>
+              <a:rPr sz="897" b="0" i="0">
                 <a:solidFill>
                   <a:srgbClr val="EAF7F5"/>
                 </a:solidFill>
@@ -10137,7 +10137,7 @@
           </a:p>
           <a:p>
             <a:r>
-              <a:rPr sz="1019" b="0" i="0">
+              <a:rPr sz="897" b="0" i="0">
                 <a:solidFill>
                   <a:srgbClr val="EAF7F5"/>
                 </a:solidFill>
@@ -10148,7 +10148,7 @@
           </a:p>
           <a:p>
             <a:r>
-              <a:rPr sz="1019" b="0" i="0">
+              <a:rPr sz="897" b="0" i="0">
                 <a:solidFill>
                   <a:srgbClr val="EAF7F5"/>
                 </a:solidFill>
@@ -10159,7 +10159,7 @@
           </a:p>
           <a:p>
             <a:r>
-              <a:rPr sz="1019" b="0" i="0">
+              <a:rPr sz="897" b="0" i="0">
                 <a:solidFill>
                   <a:srgbClr val="EAF7F5"/>
                 </a:solidFill>
@@ -10170,7 +10170,7 @@
           </a:p>
           <a:p>
             <a:r>
-              <a:rPr sz="1019" b="0" i="0">
+              <a:rPr sz="897" b="0" i="0">
                 <a:solidFill>
                   <a:srgbClr val="EAF7F5"/>
                 </a:solidFill>
@@ -10181,7 +10181,7 @@
           </a:p>
           <a:p>
             <a:r>
-              <a:rPr sz="1019" b="0" i="0">
+              <a:rPr sz="897" b="0" i="0">
                 <a:solidFill>
                   <a:srgbClr val="EAF7F5"/>
                 </a:solidFill>
@@ -10192,7 +10192,7 @@
           </a:p>
           <a:p>
             <a:r>
-              <a:rPr sz="1019" b="0" i="0">
+              <a:rPr sz="897" b="0" i="0">
                 <a:solidFill>
                   <a:srgbClr val="EAF7F5"/>
                 </a:solidFill>
@@ -10203,7 +10203,7 @@
           </a:p>
           <a:p>
             <a:r>
-              <a:rPr sz="1019" b="0" i="0">
+              <a:rPr sz="897" b="0" i="0">
                 <a:solidFill>
                   <a:srgbClr val="EAF7F5"/>
                 </a:solidFill>
@@ -10214,7 +10214,7 @@
           </a:p>
           <a:p>
             <a:r>
-              <a:rPr sz="1019" b="0" i="0">
+              <a:rPr sz="897" b="0" i="0">
                 <a:solidFill>
                   <a:srgbClr val="EAF7F5"/>
                 </a:solidFill>
@@ -10518,13 +10518,13 @@
           <a:noFill/>
         </p:spPr>
         <p:txBody>
-          <a:bodyPr wrap="square" lIns="0" rIns="0" tIns="0" bIns="0" anchor="t">
-            <a:spAutoFit/>
-          </a:bodyPr>
-          <a:lstStyle/>
-          <a:p>
-            <a:r>
-              <a:rPr sz="1108" b="0" i="0">
+          <a:bodyPr wrap="none" lIns="0" rIns="0" tIns="0" bIns="0" anchor="t">
+            <a:spAutoFit/>
+          </a:bodyPr>
+          <a:lstStyle/>
+          <a:p>
+            <a:r>
+              <a:rPr sz="975" b="0" i="0">
                 <a:solidFill>
                   <a:srgbClr val="EAF7F5"/>
                 </a:solidFill>
@@ -10535,7 +10535,7 @@
           </a:p>
           <a:p>
             <a:r>
-              <a:rPr sz="1108" b="0" i="0">
+              <a:rPr sz="975" b="0" i="0">
                 <a:solidFill>
                   <a:srgbClr val="EAF7F5"/>
                 </a:solidFill>
@@ -10546,7 +10546,7 @@
           </a:p>
           <a:p>
             <a:r>
-              <a:rPr sz="1108" b="0" i="0">
+              <a:rPr sz="975" b="0" i="0">
                 <a:solidFill>
                   <a:srgbClr val="EAF7F5"/>
                 </a:solidFill>
@@ -10557,7 +10557,7 @@
           </a:p>
           <a:p>
             <a:r>
-              <a:rPr sz="1108" b="0" i="0">
+              <a:rPr sz="975" b="0" i="0">
                 <a:solidFill>
                   <a:srgbClr val="EAF7F5"/>
                 </a:solidFill>
@@ -10568,7 +10568,7 @@
           </a:p>
           <a:p>
             <a:r>
-              <a:rPr sz="1108" b="0" i="0">
+              <a:rPr sz="975" b="0" i="0">
                 <a:solidFill>
                   <a:srgbClr val="EAF7F5"/>
                 </a:solidFill>
@@ -10579,7 +10579,7 @@
           </a:p>
           <a:p>
             <a:r>
-              <a:rPr sz="1108" b="0" i="0">
+              <a:rPr sz="975" b="0" i="0">
                 <a:solidFill>
                   <a:srgbClr val="EAF7F5"/>
                 </a:solidFill>
@@ -11360,13 +11360,13 @@
           <a:noFill/>
         </p:spPr>
         <p:txBody>
-          <a:bodyPr wrap="square" lIns="0" rIns="0" tIns="0" bIns="0" anchor="t">
-            <a:spAutoFit/>
-          </a:bodyPr>
-          <a:lstStyle/>
-          <a:p>
-            <a:r>
-              <a:rPr sz="1214" b="0" i="0">
+          <a:bodyPr wrap="none" lIns="0" rIns="0" tIns="0" bIns="0" anchor="t">
+            <a:spAutoFit/>
+          </a:bodyPr>
+          <a:lstStyle/>
+          <a:p>
+            <a:r>
+              <a:rPr sz="1068" b="0" i="0">
                 <a:solidFill>
                   <a:srgbClr val="EAF7F5"/>
                 </a:solidFill>
@@ -11377,7 +11377,7 @@
           </a:p>
           <a:p>
             <a:r>
-              <a:rPr sz="1214" b="0" i="0">
+              <a:rPr sz="1068" b="0" i="0">
                 <a:solidFill>
                   <a:srgbClr val="EAF7F5"/>
                 </a:solidFill>
@@ -11388,7 +11388,7 @@
           </a:p>
           <a:p>
             <a:r>
-              <a:rPr sz="1214" b="0" i="0">
+              <a:rPr sz="1068" b="0" i="0">
                 <a:solidFill>
                   <a:srgbClr val="EAF7F5"/>
                 </a:solidFill>
@@ -11399,7 +11399,7 @@
           </a:p>
           <a:p>
             <a:r>
-              <a:rPr sz="1214" b="0" i="0">
+              <a:rPr sz="1068" b="0" i="0">
                 <a:solidFill>
                   <a:srgbClr val="EAF7F5"/>
                 </a:solidFill>
@@ -11410,7 +11410,7 @@
           </a:p>
           <a:p>
             <a:r>
-              <a:rPr sz="1214" b="0" i="0">
+              <a:rPr sz="1068" b="0" i="0">
                 <a:solidFill>
                   <a:srgbClr val="EAF7F5"/>
                 </a:solidFill>
@@ -11421,7 +11421,7 @@
           </a:p>
           <a:p>
             <a:r>
-              <a:rPr sz="1214" b="0" i="0">
+              <a:rPr sz="1068" b="0" i="0">
                 <a:solidFill>
                   <a:srgbClr val="EAF7F5"/>
                 </a:solidFill>
@@ -11432,7 +11432,7 @@
           </a:p>
           <a:p>
             <a:r>
-              <a:rPr sz="1214" b="0" i="0">
+              <a:rPr sz="1068" b="0" i="0">
                 <a:solidFill>
                   <a:srgbClr val="EAF7F5"/>
                 </a:solidFill>
@@ -11443,7 +11443,7 @@
           </a:p>
           <a:p>
             <a:r>
-              <a:rPr sz="1214" b="0" i="0">
+              <a:rPr sz="1068" b="0" i="0">
                 <a:solidFill>
                   <a:srgbClr val="EAF7F5"/>
                 </a:solidFill>
@@ -18135,13 +18135,13 @@
           <a:noFill/>
         </p:spPr>
         <p:txBody>
-          <a:bodyPr wrap="square" lIns="0" rIns="0" tIns="0" bIns="0" anchor="t">
-            <a:spAutoFit/>
-          </a:bodyPr>
-          <a:lstStyle/>
-          <a:p>
-            <a:r>
-              <a:rPr sz="1378" b="0" i="0">
+          <a:bodyPr wrap="none" lIns="0" rIns="0" tIns="0" bIns="0" anchor="t">
+            <a:spAutoFit/>
+          </a:bodyPr>
+          <a:lstStyle/>
+          <a:p>
+            <a:r>
+              <a:rPr sz="1212" b="0" i="0">
                 <a:solidFill>
                   <a:srgbClr val="EAF7F5"/>
                 </a:solidFill>
@@ -18152,7 +18152,7 @@
           </a:p>
           <a:p>
             <a:r>
-              <a:rPr sz="1378" b="0" i="0">
+              <a:rPr sz="1212" b="0" i="0">
                 <a:solidFill>
                   <a:srgbClr val="EAF7F5"/>
                 </a:solidFill>
@@ -18163,7 +18163,7 @@
           </a:p>
           <a:p>
             <a:r>
-              <a:rPr sz="1378" b="0" i="0">
+              <a:rPr sz="1212" b="0" i="0">
                 <a:solidFill>
                   <a:srgbClr val="EAF7F5"/>
                 </a:solidFill>
@@ -18174,7 +18174,7 @@
           </a:p>
           <a:p>
             <a:r>
-              <a:rPr sz="1378" b="0" i="0">
+              <a:rPr sz="1212" b="0" i="0">
                 <a:solidFill>
                   <a:srgbClr val="EAF7F5"/>
                 </a:solidFill>
@@ -18185,7 +18185,7 @@
           </a:p>
           <a:p>
             <a:r>
-              <a:rPr sz="1378" b="0" i="0">
+              <a:rPr sz="1212" b="0" i="0">
                 <a:solidFill>
                   <a:srgbClr val="EAF7F5"/>
                 </a:solidFill>
@@ -18196,7 +18196,7 @@
           </a:p>
           <a:p>
             <a:r>
-              <a:rPr sz="1378" b="0" i="0">
+              <a:rPr sz="1212" b="0" i="0">
                 <a:solidFill>
                   <a:srgbClr val="EAF7F5"/>
                 </a:solidFill>
@@ -18207,7 +18207,7 @@
           </a:p>
           <a:p>
             <a:r>
-              <a:rPr sz="1378" b="0" i="0">
+              <a:rPr sz="1212" b="0" i="0">
                 <a:solidFill>
                   <a:srgbClr val="EAF7F5"/>
                 </a:solidFill>
@@ -18218,7 +18218,7 @@
           </a:p>
           <a:p>
             <a:r>
-              <a:rPr sz="1378" b="0" i="0">
+              <a:rPr sz="1212" b="0" i="0">
                 <a:solidFill>
                   <a:srgbClr val="EAF7F5"/>
                 </a:solidFill>
@@ -18229,7 +18229,7 @@
           </a:p>
           <a:p>
             <a:r>
-              <a:rPr sz="1378" b="0" i="0">
+              <a:rPr sz="1212" b="0" i="0">
                 <a:solidFill>
                   <a:srgbClr val="EAF7F5"/>
                 </a:solidFill>
@@ -18240,7 +18240,7 @@
           </a:p>
           <a:p>
             <a:r>
-              <a:rPr sz="1378" b="0" i="0">
+              <a:rPr sz="1212" b="0" i="0">
                 <a:solidFill>
                   <a:srgbClr val="EAF7F5"/>
                 </a:solidFill>
